--- a/public/fun/pack/pptx/news/카드뉴스_43_계절안부_설날세배.pptx
+++ b/public/fun/pack/pptx/news/카드뉴스_43_계절안부_설날세배.pptx
@@ -3287,14 +3287,6 @@
 <file path=ppt/slides/slide1.xml><?xml version="1.0" encoding="utf-8"?>
 <p:sld xmlns:a="http://schemas.openxmlformats.org/drawingml/2006/main" xmlns:p="http://schemas.openxmlformats.org/presentationml/2006/main" xmlns:r="http://schemas.openxmlformats.org/officeDocument/2006/relationships">
   <p:cSld>
-    <p:bg>
-      <p:bgPr>
-        <a:solidFill>
-          <a:srgbClr val="FFFFFF"/>
-        </a:solidFill>
-        <a:effectLst/>
-      </p:bgPr>
-    </p:bg>
     <p:spTree>
       <p:nvGrpSpPr>
         <p:cNvPr id="1" name=""/>
@@ -3302,325 +3294,30 @@
         <p:nvPr/>
       </p:nvGrpSpPr>
       <p:grpSpPr/>
-      <p:sp>
-        <p:nvSpPr>
-          <p:cNvPr id="3" name="장식"/>
-          <p:cNvSpPr/>
+      <p:pic>
+        <p:nvPicPr>
+          <p:cNvPr id="3" name="표지 그림" descr="news-43.jpg"/>
+          <p:cNvPicPr>
+            <a:picLocks noChangeAspect="1"/>
+          </p:cNvPicPr>
           <p:nvPr/>
-        </p:nvSpPr>
-        <p:spPr>
-          <a:xfrm>
-            <a:off x="-274320" y="4251960"/>
-            <a:ext cx="7406640" cy="2743200"/>
-          </a:xfrm>
-          <a:prstGeom prst="wave">
-            <a:avLst/>
-          </a:prstGeom>
-          <a:solidFill>
-            <a:srgbClr val="F0D1D6"/>
-          </a:solidFill>
-          <a:ln>
-            <a:noFill/>
-          </a:ln>
-        </p:spPr>
-        <p:txBody>
-          <a:bodyPr rtlCol="0" anchor="ctr"/>
-          <a:lstStyle/>
-          <a:p>
-            <a:pPr algn="ctr"/>
-          </a:p>
-        </p:txBody>
-      </p:sp>
-      <p:sp>
-        <p:nvSpPr>
-          <p:cNvPr id="4" name="장식"/>
-          <p:cNvSpPr/>
-          <p:nvPr/>
-        </p:nvSpPr>
-        <p:spPr>
-          <a:xfrm>
-            <a:off x="-274320" y="5074920"/>
-            <a:ext cx="7406640" cy="2331720"/>
-          </a:xfrm>
-          <a:prstGeom prst="wave">
-            <a:avLst/>
-          </a:prstGeom>
-          <a:solidFill>
-            <a:srgbClr val="8D3443"/>
-          </a:solidFill>
-          <a:ln>
-            <a:noFill/>
-          </a:ln>
-        </p:spPr>
-        <p:txBody>
-          <a:bodyPr rtlCol="0" anchor="ctr"/>
-          <a:lstStyle/>
-          <a:p>
-            <a:pPr algn="ctr"/>
-          </a:p>
-        </p:txBody>
-      </p:sp>
-      <p:sp>
-        <p:nvSpPr>
-          <p:cNvPr id="5" name="장식"/>
-          <p:cNvSpPr/>
-          <p:nvPr/>
-        </p:nvSpPr>
-        <p:spPr>
-          <a:xfrm>
-            <a:off x="4169663" y="1234440"/>
-            <a:ext cx="822959" cy="1371600"/>
-          </a:xfrm>
-          <a:prstGeom prst="roundRect">
-            <a:avLst/>
-          </a:prstGeom>
-          <a:solidFill>
-            <a:srgbClr val="8D3443"/>
-          </a:solidFill>
-          <a:ln>
-            <a:noFill/>
-          </a:ln>
-        </p:spPr>
-        <p:txBody>
-          <a:bodyPr rtlCol="0" anchor="ctr"/>
-          <a:lstStyle/>
-          <a:p>
-            <a:pPr algn="ctr"/>
-          </a:p>
-        </p:txBody>
-      </p:sp>
-      <p:sp>
-        <p:nvSpPr>
-          <p:cNvPr id="6" name="장식"/>
-          <p:cNvSpPr/>
-          <p:nvPr/>
-        </p:nvSpPr>
-        <p:spPr>
-          <a:xfrm>
-            <a:off x="4375403" y="1097280"/>
-            <a:ext cx="411479" cy="137160"/>
+        </p:nvPicPr>
+        <p:blipFill>
+          <a:blip r:embed="rId2"/>
+          <a:stretch>
+            <a:fillRect/>
+          </a:stretch>
+        </p:blipFill>
+        <p:spPr>
+          <a:xfrm>
+            <a:off x="0" y="0"/>
+            <a:ext cx="6858000" cy="6858000"/>
           </a:xfrm>
           <a:prstGeom prst="rect">
             <a:avLst/>
           </a:prstGeom>
-          <a:solidFill>
-            <a:srgbClr val="3B9158"/>
-          </a:solidFill>
-          <a:ln>
-            <a:noFill/>
-          </a:ln>
-        </p:spPr>
-        <p:txBody>
-          <a:bodyPr rtlCol="0" anchor="ctr"/>
-          <a:lstStyle/>
-          <a:p>
-            <a:pPr algn="ctr"/>
-          </a:p>
-        </p:txBody>
-      </p:sp>
-      <p:sp>
-        <p:nvSpPr>
-          <p:cNvPr id="7" name="장식"/>
-          <p:cNvSpPr/>
-          <p:nvPr/>
-        </p:nvSpPr>
-        <p:spPr>
-          <a:xfrm>
-            <a:off x="4375403" y="2606040"/>
-            <a:ext cx="411479" cy="137160"/>
-          </a:xfrm>
-          <a:prstGeom prst="rect">
-            <a:avLst/>
-          </a:prstGeom>
-          <a:solidFill>
-            <a:srgbClr val="3B9158"/>
-          </a:solidFill>
-          <a:ln>
-            <a:noFill/>
-          </a:ln>
-        </p:spPr>
-        <p:txBody>
-          <a:bodyPr rtlCol="0" anchor="ctr"/>
-          <a:lstStyle/>
-          <a:p>
-            <a:pPr algn="ctr"/>
-          </a:p>
-        </p:txBody>
-      </p:sp>
-      <p:sp>
-        <p:nvSpPr>
-          <p:cNvPr id="8" name="장식"/>
-          <p:cNvSpPr/>
-          <p:nvPr/>
-        </p:nvSpPr>
-        <p:spPr>
-          <a:xfrm>
-            <a:off x="5212079" y="1728216"/>
-            <a:ext cx="822959" cy="1152144"/>
-          </a:xfrm>
-          <a:prstGeom prst="roundRect">
-            <a:avLst/>
-          </a:prstGeom>
-          <a:solidFill>
-            <a:srgbClr val="F0D1D6"/>
-          </a:solidFill>
-          <a:ln>
-            <a:noFill/>
-          </a:ln>
-        </p:spPr>
-        <p:txBody>
-          <a:bodyPr rtlCol="0" anchor="ctr"/>
-          <a:lstStyle/>
-          <a:p>
-            <a:pPr algn="ctr"/>
-          </a:p>
-        </p:txBody>
-      </p:sp>
-      <p:sp>
-        <p:nvSpPr>
-          <p:cNvPr id="9" name="장식"/>
-          <p:cNvSpPr/>
-          <p:nvPr/>
-        </p:nvSpPr>
-        <p:spPr>
-          <a:xfrm>
-            <a:off x="5417819" y="1591056"/>
-            <a:ext cx="411479" cy="137160"/>
-          </a:xfrm>
-          <a:prstGeom prst="rect">
-            <a:avLst/>
-          </a:prstGeom>
-          <a:solidFill>
-            <a:srgbClr val="3B9158"/>
-          </a:solidFill>
-          <a:ln>
-            <a:noFill/>
-          </a:ln>
-        </p:spPr>
-        <p:txBody>
-          <a:bodyPr rtlCol="0" anchor="ctr"/>
-          <a:lstStyle/>
-          <a:p>
-            <a:pPr algn="ctr"/>
-          </a:p>
-        </p:txBody>
-      </p:sp>
-      <p:sp>
-        <p:nvSpPr>
-          <p:cNvPr id="10" name="장식"/>
-          <p:cNvSpPr/>
-          <p:nvPr/>
-        </p:nvSpPr>
-        <p:spPr>
-          <a:xfrm>
-            <a:off x="5417819" y="2880360"/>
-            <a:ext cx="411479" cy="137160"/>
-          </a:xfrm>
-          <a:prstGeom prst="rect">
-            <a:avLst/>
-          </a:prstGeom>
-          <a:solidFill>
-            <a:srgbClr val="3B9158"/>
-          </a:solidFill>
-          <a:ln>
-            <a:noFill/>
-          </a:ln>
-        </p:spPr>
-        <p:txBody>
-          <a:bodyPr rtlCol="0" anchor="ctr"/>
-          <a:lstStyle/>
-          <a:p>
-            <a:pPr algn="ctr"/>
-          </a:p>
-        </p:txBody>
-      </p:sp>
-      <p:sp>
-        <p:nvSpPr>
-          <p:cNvPr id="11" name="장식"/>
-          <p:cNvSpPr/>
-          <p:nvPr/>
-        </p:nvSpPr>
-        <p:spPr>
-          <a:xfrm>
-            <a:off x="6254495" y="1234440"/>
-            <a:ext cx="822959" cy="1371600"/>
-          </a:xfrm>
-          <a:prstGeom prst="roundRect">
-            <a:avLst/>
-          </a:prstGeom>
-          <a:solidFill>
-            <a:srgbClr val="3B9158"/>
-          </a:solidFill>
-          <a:ln>
-            <a:noFill/>
-          </a:ln>
-        </p:spPr>
-        <p:txBody>
-          <a:bodyPr rtlCol="0" anchor="ctr"/>
-          <a:lstStyle/>
-          <a:p>
-            <a:pPr algn="ctr"/>
-          </a:p>
-        </p:txBody>
-      </p:sp>
-      <p:sp>
-        <p:nvSpPr>
-          <p:cNvPr id="12" name="장식"/>
-          <p:cNvSpPr/>
-          <p:nvPr/>
-        </p:nvSpPr>
-        <p:spPr>
-          <a:xfrm>
-            <a:off x="6460235" y="1097280"/>
-            <a:ext cx="411479" cy="137160"/>
-          </a:xfrm>
-          <a:prstGeom prst="rect">
-            <a:avLst/>
-          </a:prstGeom>
-          <a:solidFill>
-            <a:srgbClr val="8D3443"/>
-          </a:solidFill>
-          <a:ln>
-            <a:noFill/>
-          </a:ln>
-        </p:spPr>
-        <p:txBody>
-          <a:bodyPr rtlCol="0" anchor="ctr"/>
-          <a:lstStyle/>
-          <a:p>
-            <a:pPr algn="ctr"/>
-          </a:p>
-        </p:txBody>
-      </p:sp>
-      <p:sp>
-        <p:nvSpPr>
-          <p:cNvPr id="13" name="장식"/>
-          <p:cNvSpPr/>
-          <p:nvPr/>
-        </p:nvSpPr>
-        <p:spPr>
-          <a:xfrm>
-            <a:off x="6460235" y="2606040"/>
-            <a:ext cx="411479" cy="137160"/>
-          </a:xfrm>
-          <a:prstGeom prst="rect">
-            <a:avLst/>
-          </a:prstGeom>
-          <a:solidFill>
-            <a:srgbClr val="8D3443"/>
-          </a:solidFill>
-          <a:ln>
-            <a:noFill/>
-          </a:ln>
-        </p:spPr>
-        <p:txBody>
-          <a:bodyPr rtlCol="0" anchor="ctr"/>
-          <a:lstStyle/>
-          <a:p>
-            <a:pPr algn="ctr"/>
-          </a:p>
-        </p:txBody>
-      </p:sp>
+        </p:spPr>
+      </p:pic>
       <p:sp>
         <p:nvSpPr>
           <p:cNvPr id="2" name="Title 1"/>
@@ -3633,8 +3330,8 @@
         </p:nvSpPr>
         <p:spPr>
           <a:xfrm>
-            <a:off x="548640" y="1371600"/>
-            <a:ext cx="4251960" cy="1463040"/>
+            <a:off x="685800" y="960120"/>
+            <a:ext cx="5486400" cy="1463040"/>
           </a:xfrm>
         </p:spPr>
         <p:txBody>
@@ -3654,21 +3351,21 @@
                   <a:srgbClr val="431920"/>
                 </a:solidFill>
               </a:rPr>
-              <a:t>새해 덕담 한 줄</a:t>
-            </a:r>
-          </a:p>
-        </p:txBody>
-      </p:sp>
-      <p:sp>
-        <p:nvSpPr>
-          <p:cNvPr id="14" name="한 줄 문구"/>
+              <a:t>눈 오는 날 안부 전화</a:t>
+            </a:r>
+          </a:p>
+        </p:txBody>
+      </p:sp>
+      <p:sp>
+        <p:nvSpPr>
+          <p:cNvPr id="4" name="한 줄 문구"/>
           <p:cNvSpPr txBox="1"/>
           <p:nvPr/>
         </p:nvSpPr>
         <p:spPr>
           <a:xfrm>
-            <a:off x="548640" y="2926080"/>
-            <a:ext cx="4114800" cy="822960"/>
+            <a:off x="685800" y="2560320"/>
+            <a:ext cx="5486400" cy="822960"/>
           </a:xfrm>
           <a:prstGeom prst="rect">
             <a:avLst/>
@@ -3699,14 +3396,14 @@
       </p:sp>
       <p:sp>
         <p:nvSpPr>
-          <p:cNvPr id="15" name="안내 문구"/>
+          <p:cNvPr id="5" name="안내 문구"/>
           <p:cNvSpPr txBox="1"/>
           <p:nvPr/>
         </p:nvSpPr>
         <p:spPr>
           <a:xfrm>
-            <a:off x="548640" y="3794760"/>
-            <a:ext cx="4114800" cy="914400"/>
+            <a:off x="685800" y="3429000"/>
+            <a:ext cx="5486400" cy="914400"/>
           </a:xfrm>
           <a:prstGeom prst="rect">
             <a:avLst/>
@@ -3821,267 +3518,6 @@
       </p:sp>
       <p:sp>
         <p:nvSpPr>
-          <p:cNvPr id="5" name="장식"/>
-          <p:cNvSpPr/>
-          <p:nvPr/>
-        </p:nvSpPr>
-        <p:spPr>
-          <a:xfrm>
-            <a:off x="5456224" y="525780"/>
-            <a:ext cx="301752" cy="502920"/>
-          </a:xfrm>
-          <a:prstGeom prst="roundRect">
-            <a:avLst/>
-          </a:prstGeom>
-          <a:solidFill>
-            <a:srgbClr val="8D3443"/>
-          </a:solidFill>
-          <a:ln>
-            <a:noFill/>
-          </a:ln>
-        </p:spPr>
-        <p:txBody>
-          <a:bodyPr rtlCol="0" anchor="ctr"/>
-          <a:lstStyle/>
-          <a:p>
-            <a:pPr algn="ctr"/>
-          </a:p>
-        </p:txBody>
-      </p:sp>
-      <p:sp>
-        <p:nvSpPr>
-          <p:cNvPr id="6" name="장식"/>
-          <p:cNvSpPr/>
-          <p:nvPr/>
-        </p:nvSpPr>
-        <p:spPr>
-          <a:xfrm>
-            <a:off x="5531662" y="475487"/>
-            <a:ext cx="150876" cy="50292"/>
-          </a:xfrm>
-          <a:prstGeom prst="rect">
-            <a:avLst/>
-          </a:prstGeom>
-          <a:solidFill>
-            <a:srgbClr val="3B9158"/>
-          </a:solidFill>
-          <a:ln>
-            <a:noFill/>
-          </a:ln>
-        </p:spPr>
-        <p:txBody>
-          <a:bodyPr rtlCol="0" anchor="ctr"/>
-          <a:lstStyle/>
-          <a:p>
-            <a:pPr algn="ctr"/>
-          </a:p>
-        </p:txBody>
-      </p:sp>
-      <p:sp>
-        <p:nvSpPr>
-          <p:cNvPr id="7" name="장식"/>
-          <p:cNvSpPr/>
-          <p:nvPr/>
-        </p:nvSpPr>
-        <p:spPr>
-          <a:xfrm>
-            <a:off x="5531662" y="1028700"/>
-            <a:ext cx="150876" cy="50292"/>
-          </a:xfrm>
-          <a:prstGeom prst="rect">
-            <a:avLst/>
-          </a:prstGeom>
-          <a:solidFill>
-            <a:srgbClr val="3B9158"/>
-          </a:solidFill>
-          <a:ln>
-            <a:noFill/>
-          </a:ln>
-        </p:spPr>
-        <p:txBody>
-          <a:bodyPr rtlCol="0" anchor="ctr"/>
-          <a:lstStyle/>
-          <a:p>
-            <a:pPr algn="ctr"/>
-          </a:p>
-        </p:txBody>
-      </p:sp>
-      <p:sp>
-        <p:nvSpPr>
-          <p:cNvPr id="8" name="장식"/>
-          <p:cNvSpPr/>
-          <p:nvPr/>
-        </p:nvSpPr>
-        <p:spPr>
-          <a:xfrm>
-            <a:off x="5838444" y="706831"/>
-            <a:ext cx="301752" cy="422452"/>
-          </a:xfrm>
-          <a:prstGeom prst="roundRect">
-            <a:avLst/>
-          </a:prstGeom>
-          <a:solidFill>
-            <a:srgbClr val="F0D1D6"/>
-          </a:solidFill>
-          <a:ln>
-            <a:noFill/>
-          </a:ln>
-        </p:spPr>
-        <p:txBody>
-          <a:bodyPr rtlCol="0" anchor="ctr"/>
-          <a:lstStyle/>
-          <a:p>
-            <a:pPr algn="ctr"/>
-          </a:p>
-        </p:txBody>
-      </p:sp>
-      <p:sp>
-        <p:nvSpPr>
-          <p:cNvPr id="9" name="장식"/>
-          <p:cNvSpPr/>
-          <p:nvPr/>
-        </p:nvSpPr>
-        <p:spPr>
-          <a:xfrm>
-            <a:off x="5913881" y="656539"/>
-            <a:ext cx="150876" cy="50292"/>
-          </a:xfrm>
-          <a:prstGeom prst="rect">
-            <a:avLst/>
-          </a:prstGeom>
-          <a:solidFill>
-            <a:srgbClr val="3B9158"/>
-          </a:solidFill>
-          <a:ln>
-            <a:noFill/>
-          </a:ln>
-        </p:spPr>
-        <p:txBody>
-          <a:bodyPr rtlCol="0" anchor="ctr"/>
-          <a:lstStyle/>
-          <a:p>
-            <a:pPr algn="ctr"/>
-          </a:p>
-        </p:txBody>
-      </p:sp>
-      <p:sp>
-        <p:nvSpPr>
-          <p:cNvPr id="10" name="장식"/>
-          <p:cNvSpPr/>
-          <p:nvPr/>
-        </p:nvSpPr>
-        <p:spPr>
-          <a:xfrm>
-            <a:off x="5913881" y="1129284"/>
-            <a:ext cx="150876" cy="50292"/>
-          </a:xfrm>
-          <a:prstGeom prst="rect">
-            <a:avLst/>
-          </a:prstGeom>
-          <a:solidFill>
-            <a:srgbClr val="3B9158"/>
-          </a:solidFill>
-          <a:ln>
-            <a:noFill/>
-          </a:ln>
-        </p:spPr>
-        <p:txBody>
-          <a:bodyPr rtlCol="0" anchor="ctr"/>
-          <a:lstStyle/>
-          <a:p>
-            <a:pPr algn="ctr"/>
-          </a:p>
-        </p:txBody>
-      </p:sp>
-      <p:sp>
-        <p:nvSpPr>
-          <p:cNvPr id="11" name="장식"/>
-          <p:cNvSpPr/>
-          <p:nvPr/>
-        </p:nvSpPr>
-        <p:spPr>
-          <a:xfrm>
-            <a:off x="6220663" y="525780"/>
-            <a:ext cx="301752" cy="502920"/>
-          </a:xfrm>
-          <a:prstGeom prst="roundRect">
-            <a:avLst/>
-          </a:prstGeom>
-          <a:solidFill>
-            <a:srgbClr val="3B9158"/>
-          </a:solidFill>
-          <a:ln>
-            <a:noFill/>
-          </a:ln>
-        </p:spPr>
-        <p:txBody>
-          <a:bodyPr rtlCol="0" anchor="ctr"/>
-          <a:lstStyle/>
-          <a:p>
-            <a:pPr algn="ctr"/>
-          </a:p>
-        </p:txBody>
-      </p:sp>
-      <p:sp>
-        <p:nvSpPr>
-          <p:cNvPr id="12" name="장식"/>
-          <p:cNvSpPr/>
-          <p:nvPr/>
-        </p:nvSpPr>
-        <p:spPr>
-          <a:xfrm>
-            <a:off x="6296101" y="475487"/>
-            <a:ext cx="150876" cy="50292"/>
-          </a:xfrm>
-          <a:prstGeom prst="rect">
-            <a:avLst/>
-          </a:prstGeom>
-          <a:solidFill>
-            <a:srgbClr val="8D3443"/>
-          </a:solidFill>
-          <a:ln>
-            <a:noFill/>
-          </a:ln>
-        </p:spPr>
-        <p:txBody>
-          <a:bodyPr rtlCol="0" anchor="ctr"/>
-          <a:lstStyle/>
-          <a:p>
-            <a:pPr algn="ctr"/>
-          </a:p>
-        </p:txBody>
-      </p:sp>
-      <p:sp>
-        <p:nvSpPr>
-          <p:cNvPr id="13" name="장식"/>
-          <p:cNvSpPr/>
-          <p:nvPr/>
-        </p:nvSpPr>
-        <p:spPr>
-          <a:xfrm>
-            <a:off x="6296101" y="1028700"/>
-            <a:ext cx="150876" cy="50292"/>
-          </a:xfrm>
-          <a:prstGeom prst="rect">
-            <a:avLst/>
-          </a:prstGeom>
-          <a:solidFill>
-            <a:srgbClr val="8D3443"/>
-          </a:solidFill>
-          <a:ln>
-            <a:noFill/>
-          </a:ln>
-        </p:spPr>
-        <p:txBody>
-          <a:bodyPr rtlCol="0" anchor="ctr"/>
-          <a:lstStyle/>
-          <a:p>
-            <a:pPr algn="ctr"/>
-          </a:p>
-        </p:txBody>
-      </p:sp>
-      <p:sp>
-        <p:nvSpPr>
           <p:cNvPr id="2" name="Title 1"/>
           <p:cNvSpPr>
             <a:spLocks noGrp="1"/>
@@ -4120,7 +3556,7 @@
       </p:sp>
       <p:sp>
         <p:nvSpPr>
-          <p:cNvPr id="14" name="번호"/>
+          <p:cNvPr id="5" name="번호"/>
           <p:cNvSpPr txBox="1"/>
           <p:nvPr/>
         </p:nvSpPr>
@@ -4158,7 +3594,7 @@
       </p:sp>
       <p:sp>
         <p:nvSpPr>
-          <p:cNvPr id="15" name="본문"/>
+          <p:cNvPr id="6" name="본문"/>
           <p:cNvSpPr txBox="1"/>
           <p:nvPr/>
         </p:nvSpPr>
@@ -4196,7 +3632,7 @@
       </p:sp>
       <p:sp>
         <p:nvSpPr>
-          <p:cNvPr id="16" name="쪽 번호"/>
+          <p:cNvPr id="7" name="쪽 번호"/>
           <p:cNvSpPr txBox="1"/>
           <p:nvPr/>
         </p:nvSpPr>
@@ -4318,267 +3754,6 @@
       </p:sp>
       <p:sp>
         <p:nvSpPr>
-          <p:cNvPr id="5" name="장식"/>
-          <p:cNvSpPr/>
-          <p:nvPr/>
-        </p:nvSpPr>
-        <p:spPr>
-          <a:xfrm>
-            <a:off x="5456224" y="525780"/>
-            <a:ext cx="301752" cy="502920"/>
-          </a:xfrm>
-          <a:prstGeom prst="roundRect">
-            <a:avLst/>
-          </a:prstGeom>
-          <a:solidFill>
-            <a:srgbClr val="8D3443"/>
-          </a:solidFill>
-          <a:ln>
-            <a:noFill/>
-          </a:ln>
-        </p:spPr>
-        <p:txBody>
-          <a:bodyPr rtlCol="0" anchor="ctr"/>
-          <a:lstStyle/>
-          <a:p>
-            <a:pPr algn="ctr"/>
-          </a:p>
-        </p:txBody>
-      </p:sp>
-      <p:sp>
-        <p:nvSpPr>
-          <p:cNvPr id="6" name="장식"/>
-          <p:cNvSpPr/>
-          <p:nvPr/>
-        </p:nvSpPr>
-        <p:spPr>
-          <a:xfrm>
-            <a:off x="5531662" y="475487"/>
-            <a:ext cx="150876" cy="50292"/>
-          </a:xfrm>
-          <a:prstGeom prst="rect">
-            <a:avLst/>
-          </a:prstGeom>
-          <a:solidFill>
-            <a:srgbClr val="3B9158"/>
-          </a:solidFill>
-          <a:ln>
-            <a:noFill/>
-          </a:ln>
-        </p:spPr>
-        <p:txBody>
-          <a:bodyPr rtlCol="0" anchor="ctr"/>
-          <a:lstStyle/>
-          <a:p>
-            <a:pPr algn="ctr"/>
-          </a:p>
-        </p:txBody>
-      </p:sp>
-      <p:sp>
-        <p:nvSpPr>
-          <p:cNvPr id="7" name="장식"/>
-          <p:cNvSpPr/>
-          <p:nvPr/>
-        </p:nvSpPr>
-        <p:spPr>
-          <a:xfrm>
-            <a:off x="5531662" y="1028700"/>
-            <a:ext cx="150876" cy="50292"/>
-          </a:xfrm>
-          <a:prstGeom prst="rect">
-            <a:avLst/>
-          </a:prstGeom>
-          <a:solidFill>
-            <a:srgbClr val="3B9158"/>
-          </a:solidFill>
-          <a:ln>
-            <a:noFill/>
-          </a:ln>
-        </p:spPr>
-        <p:txBody>
-          <a:bodyPr rtlCol="0" anchor="ctr"/>
-          <a:lstStyle/>
-          <a:p>
-            <a:pPr algn="ctr"/>
-          </a:p>
-        </p:txBody>
-      </p:sp>
-      <p:sp>
-        <p:nvSpPr>
-          <p:cNvPr id="8" name="장식"/>
-          <p:cNvSpPr/>
-          <p:nvPr/>
-        </p:nvSpPr>
-        <p:spPr>
-          <a:xfrm>
-            <a:off x="5838444" y="706831"/>
-            <a:ext cx="301752" cy="422452"/>
-          </a:xfrm>
-          <a:prstGeom prst="roundRect">
-            <a:avLst/>
-          </a:prstGeom>
-          <a:solidFill>
-            <a:srgbClr val="F0D1D6"/>
-          </a:solidFill>
-          <a:ln>
-            <a:noFill/>
-          </a:ln>
-        </p:spPr>
-        <p:txBody>
-          <a:bodyPr rtlCol="0" anchor="ctr"/>
-          <a:lstStyle/>
-          <a:p>
-            <a:pPr algn="ctr"/>
-          </a:p>
-        </p:txBody>
-      </p:sp>
-      <p:sp>
-        <p:nvSpPr>
-          <p:cNvPr id="9" name="장식"/>
-          <p:cNvSpPr/>
-          <p:nvPr/>
-        </p:nvSpPr>
-        <p:spPr>
-          <a:xfrm>
-            <a:off x="5913881" y="656539"/>
-            <a:ext cx="150876" cy="50292"/>
-          </a:xfrm>
-          <a:prstGeom prst="rect">
-            <a:avLst/>
-          </a:prstGeom>
-          <a:solidFill>
-            <a:srgbClr val="3B9158"/>
-          </a:solidFill>
-          <a:ln>
-            <a:noFill/>
-          </a:ln>
-        </p:spPr>
-        <p:txBody>
-          <a:bodyPr rtlCol="0" anchor="ctr"/>
-          <a:lstStyle/>
-          <a:p>
-            <a:pPr algn="ctr"/>
-          </a:p>
-        </p:txBody>
-      </p:sp>
-      <p:sp>
-        <p:nvSpPr>
-          <p:cNvPr id="10" name="장식"/>
-          <p:cNvSpPr/>
-          <p:nvPr/>
-        </p:nvSpPr>
-        <p:spPr>
-          <a:xfrm>
-            <a:off x="5913881" y="1129284"/>
-            <a:ext cx="150876" cy="50292"/>
-          </a:xfrm>
-          <a:prstGeom prst="rect">
-            <a:avLst/>
-          </a:prstGeom>
-          <a:solidFill>
-            <a:srgbClr val="3B9158"/>
-          </a:solidFill>
-          <a:ln>
-            <a:noFill/>
-          </a:ln>
-        </p:spPr>
-        <p:txBody>
-          <a:bodyPr rtlCol="0" anchor="ctr"/>
-          <a:lstStyle/>
-          <a:p>
-            <a:pPr algn="ctr"/>
-          </a:p>
-        </p:txBody>
-      </p:sp>
-      <p:sp>
-        <p:nvSpPr>
-          <p:cNvPr id="11" name="장식"/>
-          <p:cNvSpPr/>
-          <p:nvPr/>
-        </p:nvSpPr>
-        <p:spPr>
-          <a:xfrm>
-            <a:off x="6220663" y="525780"/>
-            <a:ext cx="301752" cy="502920"/>
-          </a:xfrm>
-          <a:prstGeom prst="roundRect">
-            <a:avLst/>
-          </a:prstGeom>
-          <a:solidFill>
-            <a:srgbClr val="3B9158"/>
-          </a:solidFill>
-          <a:ln>
-            <a:noFill/>
-          </a:ln>
-        </p:spPr>
-        <p:txBody>
-          <a:bodyPr rtlCol="0" anchor="ctr"/>
-          <a:lstStyle/>
-          <a:p>
-            <a:pPr algn="ctr"/>
-          </a:p>
-        </p:txBody>
-      </p:sp>
-      <p:sp>
-        <p:nvSpPr>
-          <p:cNvPr id="12" name="장식"/>
-          <p:cNvSpPr/>
-          <p:nvPr/>
-        </p:nvSpPr>
-        <p:spPr>
-          <a:xfrm>
-            <a:off x="6296101" y="475487"/>
-            <a:ext cx="150876" cy="50292"/>
-          </a:xfrm>
-          <a:prstGeom prst="rect">
-            <a:avLst/>
-          </a:prstGeom>
-          <a:solidFill>
-            <a:srgbClr val="8D3443"/>
-          </a:solidFill>
-          <a:ln>
-            <a:noFill/>
-          </a:ln>
-        </p:spPr>
-        <p:txBody>
-          <a:bodyPr rtlCol="0" anchor="ctr"/>
-          <a:lstStyle/>
-          <a:p>
-            <a:pPr algn="ctr"/>
-          </a:p>
-        </p:txBody>
-      </p:sp>
-      <p:sp>
-        <p:nvSpPr>
-          <p:cNvPr id="13" name="장식"/>
-          <p:cNvSpPr/>
-          <p:nvPr/>
-        </p:nvSpPr>
-        <p:spPr>
-          <a:xfrm>
-            <a:off x="6296101" y="1028700"/>
-            <a:ext cx="150876" cy="50292"/>
-          </a:xfrm>
-          <a:prstGeom prst="rect">
-            <a:avLst/>
-          </a:prstGeom>
-          <a:solidFill>
-            <a:srgbClr val="8D3443"/>
-          </a:solidFill>
-          <a:ln>
-            <a:noFill/>
-          </a:ln>
-        </p:spPr>
-        <p:txBody>
-          <a:bodyPr rtlCol="0" anchor="ctr"/>
-          <a:lstStyle/>
-          <a:p>
-            <a:pPr algn="ctr"/>
-          </a:p>
-        </p:txBody>
-      </p:sp>
-      <p:sp>
-        <p:nvSpPr>
           <p:cNvPr id="2" name="Title 1"/>
           <p:cNvSpPr>
             <a:spLocks noGrp="1"/>
@@ -4617,7 +3792,7 @@
       </p:sp>
       <p:sp>
         <p:nvSpPr>
-          <p:cNvPr id="14" name="번호"/>
+          <p:cNvPr id="5" name="번호"/>
           <p:cNvSpPr txBox="1"/>
           <p:nvPr/>
         </p:nvSpPr>
@@ -4655,7 +3830,7 @@
       </p:sp>
       <p:sp>
         <p:nvSpPr>
-          <p:cNvPr id="15" name="본문"/>
+          <p:cNvPr id="6" name="본문"/>
           <p:cNvSpPr txBox="1"/>
           <p:nvPr/>
         </p:nvSpPr>
@@ -4693,7 +3868,7 @@
       </p:sp>
       <p:sp>
         <p:nvSpPr>
-          <p:cNvPr id="16" name="쪽 번호"/>
+          <p:cNvPr id="7" name="쪽 번호"/>
           <p:cNvSpPr txBox="1"/>
           <p:nvPr/>
         </p:nvSpPr>
@@ -4815,267 +3990,6 @@
       </p:sp>
       <p:sp>
         <p:nvSpPr>
-          <p:cNvPr id="5" name="장식"/>
-          <p:cNvSpPr/>
-          <p:nvPr/>
-        </p:nvSpPr>
-        <p:spPr>
-          <a:xfrm>
-            <a:off x="5456224" y="525780"/>
-            <a:ext cx="301752" cy="502920"/>
-          </a:xfrm>
-          <a:prstGeom prst="roundRect">
-            <a:avLst/>
-          </a:prstGeom>
-          <a:solidFill>
-            <a:srgbClr val="8D3443"/>
-          </a:solidFill>
-          <a:ln>
-            <a:noFill/>
-          </a:ln>
-        </p:spPr>
-        <p:txBody>
-          <a:bodyPr rtlCol="0" anchor="ctr"/>
-          <a:lstStyle/>
-          <a:p>
-            <a:pPr algn="ctr"/>
-          </a:p>
-        </p:txBody>
-      </p:sp>
-      <p:sp>
-        <p:nvSpPr>
-          <p:cNvPr id="6" name="장식"/>
-          <p:cNvSpPr/>
-          <p:nvPr/>
-        </p:nvSpPr>
-        <p:spPr>
-          <a:xfrm>
-            <a:off x="5531662" y="475487"/>
-            <a:ext cx="150876" cy="50292"/>
-          </a:xfrm>
-          <a:prstGeom prst="rect">
-            <a:avLst/>
-          </a:prstGeom>
-          <a:solidFill>
-            <a:srgbClr val="3B9158"/>
-          </a:solidFill>
-          <a:ln>
-            <a:noFill/>
-          </a:ln>
-        </p:spPr>
-        <p:txBody>
-          <a:bodyPr rtlCol="0" anchor="ctr"/>
-          <a:lstStyle/>
-          <a:p>
-            <a:pPr algn="ctr"/>
-          </a:p>
-        </p:txBody>
-      </p:sp>
-      <p:sp>
-        <p:nvSpPr>
-          <p:cNvPr id="7" name="장식"/>
-          <p:cNvSpPr/>
-          <p:nvPr/>
-        </p:nvSpPr>
-        <p:spPr>
-          <a:xfrm>
-            <a:off x="5531662" y="1028700"/>
-            <a:ext cx="150876" cy="50292"/>
-          </a:xfrm>
-          <a:prstGeom prst="rect">
-            <a:avLst/>
-          </a:prstGeom>
-          <a:solidFill>
-            <a:srgbClr val="3B9158"/>
-          </a:solidFill>
-          <a:ln>
-            <a:noFill/>
-          </a:ln>
-        </p:spPr>
-        <p:txBody>
-          <a:bodyPr rtlCol="0" anchor="ctr"/>
-          <a:lstStyle/>
-          <a:p>
-            <a:pPr algn="ctr"/>
-          </a:p>
-        </p:txBody>
-      </p:sp>
-      <p:sp>
-        <p:nvSpPr>
-          <p:cNvPr id="8" name="장식"/>
-          <p:cNvSpPr/>
-          <p:nvPr/>
-        </p:nvSpPr>
-        <p:spPr>
-          <a:xfrm>
-            <a:off x="5838444" y="706831"/>
-            <a:ext cx="301752" cy="422452"/>
-          </a:xfrm>
-          <a:prstGeom prst="roundRect">
-            <a:avLst/>
-          </a:prstGeom>
-          <a:solidFill>
-            <a:srgbClr val="F0D1D6"/>
-          </a:solidFill>
-          <a:ln>
-            <a:noFill/>
-          </a:ln>
-        </p:spPr>
-        <p:txBody>
-          <a:bodyPr rtlCol="0" anchor="ctr"/>
-          <a:lstStyle/>
-          <a:p>
-            <a:pPr algn="ctr"/>
-          </a:p>
-        </p:txBody>
-      </p:sp>
-      <p:sp>
-        <p:nvSpPr>
-          <p:cNvPr id="9" name="장식"/>
-          <p:cNvSpPr/>
-          <p:nvPr/>
-        </p:nvSpPr>
-        <p:spPr>
-          <a:xfrm>
-            <a:off x="5913881" y="656539"/>
-            <a:ext cx="150876" cy="50292"/>
-          </a:xfrm>
-          <a:prstGeom prst="rect">
-            <a:avLst/>
-          </a:prstGeom>
-          <a:solidFill>
-            <a:srgbClr val="3B9158"/>
-          </a:solidFill>
-          <a:ln>
-            <a:noFill/>
-          </a:ln>
-        </p:spPr>
-        <p:txBody>
-          <a:bodyPr rtlCol="0" anchor="ctr"/>
-          <a:lstStyle/>
-          <a:p>
-            <a:pPr algn="ctr"/>
-          </a:p>
-        </p:txBody>
-      </p:sp>
-      <p:sp>
-        <p:nvSpPr>
-          <p:cNvPr id="10" name="장식"/>
-          <p:cNvSpPr/>
-          <p:nvPr/>
-        </p:nvSpPr>
-        <p:spPr>
-          <a:xfrm>
-            <a:off x="5913881" y="1129284"/>
-            <a:ext cx="150876" cy="50292"/>
-          </a:xfrm>
-          <a:prstGeom prst="rect">
-            <a:avLst/>
-          </a:prstGeom>
-          <a:solidFill>
-            <a:srgbClr val="3B9158"/>
-          </a:solidFill>
-          <a:ln>
-            <a:noFill/>
-          </a:ln>
-        </p:spPr>
-        <p:txBody>
-          <a:bodyPr rtlCol="0" anchor="ctr"/>
-          <a:lstStyle/>
-          <a:p>
-            <a:pPr algn="ctr"/>
-          </a:p>
-        </p:txBody>
-      </p:sp>
-      <p:sp>
-        <p:nvSpPr>
-          <p:cNvPr id="11" name="장식"/>
-          <p:cNvSpPr/>
-          <p:nvPr/>
-        </p:nvSpPr>
-        <p:spPr>
-          <a:xfrm>
-            <a:off x="6220663" y="525780"/>
-            <a:ext cx="301752" cy="502920"/>
-          </a:xfrm>
-          <a:prstGeom prst="roundRect">
-            <a:avLst/>
-          </a:prstGeom>
-          <a:solidFill>
-            <a:srgbClr val="3B9158"/>
-          </a:solidFill>
-          <a:ln>
-            <a:noFill/>
-          </a:ln>
-        </p:spPr>
-        <p:txBody>
-          <a:bodyPr rtlCol="0" anchor="ctr"/>
-          <a:lstStyle/>
-          <a:p>
-            <a:pPr algn="ctr"/>
-          </a:p>
-        </p:txBody>
-      </p:sp>
-      <p:sp>
-        <p:nvSpPr>
-          <p:cNvPr id="12" name="장식"/>
-          <p:cNvSpPr/>
-          <p:nvPr/>
-        </p:nvSpPr>
-        <p:spPr>
-          <a:xfrm>
-            <a:off x="6296101" y="475487"/>
-            <a:ext cx="150876" cy="50292"/>
-          </a:xfrm>
-          <a:prstGeom prst="rect">
-            <a:avLst/>
-          </a:prstGeom>
-          <a:solidFill>
-            <a:srgbClr val="8D3443"/>
-          </a:solidFill>
-          <a:ln>
-            <a:noFill/>
-          </a:ln>
-        </p:spPr>
-        <p:txBody>
-          <a:bodyPr rtlCol="0" anchor="ctr"/>
-          <a:lstStyle/>
-          <a:p>
-            <a:pPr algn="ctr"/>
-          </a:p>
-        </p:txBody>
-      </p:sp>
-      <p:sp>
-        <p:nvSpPr>
-          <p:cNvPr id="13" name="장식"/>
-          <p:cNvSpPr/>
-          <p:nvPr/>
-        </p:nvSpPr>
-        <p:spPr>
-          <a:xfrm>
-            <a:off x="6296101" y="1028700"/>
-            <a:ext cx="150876" cy="50292"/>
-          </a:xfrm>
-          <a:prstGeom prst="rect">
-            <a:avLst/>
-          </a:prstGeom>
-          <a:solidFill>
-            <a:srgbClr val="8D3443"/>
-          </a:solidFill>
-          <a:ln>
-            <a:noFill/>
-          </a:ln>
-        </p:spPr>
-        <p:txBody>
-          <a:bodyPr rtlCol="0" anchor="ctr"/>
-          <a:lstStyle/>
-          <a:p>
-            <a:pPr algn="ctr"/>
-          </a:p>
-        </p:txBody>
-      </p:sp>
-      <p:sp>
-        <p:nvSpPr>
           <p:cNvPr id="2" name="Title 1"/>
           <p:cNvSpPr>
             <a:spLocks noGrp="1"/>
@@ -5114,7 +4028,7 @@
       </p:sp>
       <p:sp>
         <p:nvSpPr>
-          <p:cNvPr id="14" name="번호"/>
+          <p:cNvPr id="5" name="번호"/>
           <p:cNvSpPr txBox="1"/>
           <p:nvPr/>
         </p:nvSpPr>
@@ -5152,7 +4066,7 @@
       </p:sp>
       <p:sp>
         <p:nvSpPr>
-          <p:cNvPr id="15" name="본문"/>
+          <p:cNvPr id="6" name="본문"/>
           <p:cNvSpPr txBox="1"/>
           <p:nvPr/>
         </p:nvSpPr>
@@ -5190,7 +4104,7 @@
       </p:sp>
       <p:sp>
         <p:nvSpPr>
-          <p:cNvPr id="16" name="쪽 번호"/>
+          <p:cNvPr id="7" name="쪽 번호"/>
           <p:cNvSpPr txBox="1"/>
           <p:nvPr/>
         </p:nvSpPr>
@@ -5312,267 +4226,6 @@
       </p:sp>
       <p:sp>
         <p:nvSpPr>
-          <p:cNvPr id="5" name="장식"/>
-          <p:cNvSpPr/>
-          <p:nvPr/>
-        </p:nvSpPr>
-        <p:spPr>
-          <a:xfrm>
-            <a:off x="5456224" y="525780"/>
-            <a:ext cx="301752" cy="502920"/>
-          </a:xfrm>
-          <a:prstGeom prst="roundRect">
-            <a:avLst/>
-          </a:prstGeom>
-          <a:solidFill>
-            <a:srgbClr val="8D3443"/>
-          </a:solidFill>
-          <a:ln>
-            <a:noFill/>
-          </a:ln>
-        </p:spPr>
-        <p:txBody>
-          <a:bodyPr rtlCol="0" anchor="ctr"/>
-          <a:lstStyle/>
-          <a:p>
-            <a:pPr algn="ctr"/>
-          </a:p>
-        </p:txBody>
-      </p:sp>
-      <p:sp>
-        <p:nvSpPr>
-          <p:cNvPr id="6" name="장식"/>
-          <p:cNvSpPr/>
-          <p:nvPr/>
-        </p:nvSpPr>
-        <p:spPr>
-          <a:xfrm>
-            <a:off x="5531662" y="475487"/>
-            <a:ext cx="150876" cy="50292"/>
-          </a:xfrm>
-          <a:prstGeom prst="rect">
-            <a:avLst/>
-          </a:prstGeom>
-          <a:solidFill>
-            <a:srgbClr val="3B9158"/>
-          </a:solidFill>
-          <a:ln>
-            <a:noFill/>
-          </a:ln>
-        </p:spPr>
-        <p:txBody>
-          <a:bodyPr rtlCol="0" anchor="ctr"/>
-          <a:lstStyle/>
-          <a:p>
-            <a:pPr algn="ctr"/>
-          </a:p>
-        </p:txBody>
-      </p:sp>
-      <p:sp>
-        <p:nvSpPr>
-          <p:cNvPr id="7" name="장식"/>
-          <p:cNvSpPr/>
-          <p:nvPr/>
-        </p:nvSpPr>
-        <p:spPr>
-          <a:xfrm>
-            <a:off x="5531662" y="1028700"/>
-            <a:ext cx="150876" cy="50292"/>
-          </a:xfrm>
-          <a:prstGeom prst="rect">
-            <a:avLst/>
-          </a:prstGeom>
-          <a:solidFill>
-            <a:srgbClr val="3B9158"/>
-          </a:solidFill>
-          <a:ln>
-            <a:noFill/>
-          </a:ln>
-        </p:spPr>
-        <p:txBody>
-          <a:bodyPr rtlCol="0" anchor="ctr"/>
-          <a:lstStyle/>
-          <a:p>
-            <a:pPr algn="ctr"/>
-          </a:p>
-        </p:txBody>
-      </p:sp>
-      <p:sp>
-        <p:nvSpPr>
-          <p:cNvPr id="8" name="장식"/>
-          <p:cNvSpPr/>
-          <p:nvPr/>
-        </p:nvSpPr>
-        <p:spPr>
-          <a:xfrm>
-            <a:off x="5838444" y="706831"/>
-            <a:ext cx="301752" cy="422452"/>
-          </a:xfrm>
-          <a:prstGeom prst="roundRect">
-            <a:avLst/>
-          </a:prstGeom>
-          <a:solidFill>
-            <a:srgbClr val="F0D1D6"/>
-          </a:solidFill>
-          <a:ln>
-            <a:noFill/>
-          </a:ln>
-        </p:spPr>
-        <p:txBody>
-          <a:bodyPr rtlCol="0" anchor="ctr"/>
-          <a:lstStyle/>
-          <a:p>
-            <a:pPr algn="ctr"/>
-          </a:p>
-        </p:txBody>
-      </p:sp>
-      <p:sp>
-        <p:nvSpPr>
-          <p:cNvPr id="9" name="장식"/>
-          <p:cNvSpPr/>
-          <p:nvPr/>
-        </p:nvSpPr>
-        <p:spPr>
-          <a:xfrm>
-            <a:off x="5913881" y="656539"/>
-            <a:ext cx="150876" cy="50292"/>
-          </a:xfrm>
-          <a:prstGeom prst="rect">
-            <a:avLst/>
-          </a:prstGeom>
-          <a:solidFill>
-            <a:srgbClr val="3B9158"/>
-          </a:solidFill>
-          <a:ln>
-            <a:noFill/>
-          </a:ln>
-        </p:spPr>
-        <p:txBody>
-          <a:bodyPr rtlCol="0" anchor="ctr"/>
-          <a:lstStyle/>
-          <a:p>
-            <a:pPr algn="ctr"/>
-          </a:p>
-        </p:txBody>
-      </p:sp>
-      <p:sp>
-        <p:nvSpPr>
-          <p:cNvPr id="10" name="장식"/>
-          <p:cNvSpPr/>
-          <p:nvPr/>
-        </p:nvSpPr>
-        <p:spPr>
-          <a:xfrm>
-            <a:off x="5913881" y="1129284"/>
-            <a:ext cx="150876" cy="50292"/>
-          </a:xfrm>
-          <a:prstGeom prst="rect">
-            <a:avLst/>
-          </a:prstGeom>
-          <a:solidFill>
-            <a:srgbClr val="3B9158"/>
-          </a:solidFill>
-          <a:ln>
-            <a:noFill/>
-          </a:ln>
-        </p:spPr>
-        <p:txBody>
-          <a:bodyPr rtlCol="0" anchor="ctr"/>
-          <a:lstStyle/>
-          <a:p>
-            <a:pPr algn="ctr"/>
-          </a:p>
-        </p:txBody>
-      </p:sp>
-      <p:sp>
-        <p:nvSpPr>
-          <p:cNvPr id="11" name="장식"/>
-          <p:cNvSpPr/>
-          <p:nvPr/>
-        </p:nvSpPr>
-        <p:spPr>
-          <a:xfrm>
-            <a:off x="6220663" y="525780"/>
-            <a:ext cx="301752" cy="502920"/>
-          </a:xfrm>
-          <a:prstGeom prst="roundRect">
-            <a:avLst/>
-          </a:prstGeom>
-          <a:solidFill>
-            <a:srgbClr val="3B9158"/>
-          </a:solidFill>
-          <a:ln>
-            <a:noFill/>
-          </a:ln>
-        </p:spPr>
-        <p:txBody>
-          <a:bodyPr rtlCol="0" anchor="ctr"/>
-          <a:lstStyle/>
-          <a:p>
-            <a:pPr algn="ctr"/>
-          </a:p>
-        </p:txBody>
-      </p:sp>
-      <p:sp>
-        <p:nvSpPr>
-          <p:cNvPr id="12" name="장식"/>
-          <p:cNvSpPr/>
-          <p:nvPr/>
-        </p:nvSpPr>
-        <p:spPr>
-          <a:xfrm>
-            <a:off x="6296101" y="475487"/>
-            <a:ext cx="150876" cy="50292"/>
-          </a:xfrm>
-          <a:prstGeom prst="rect">
-            <a:avLst/>
-          </a:prstGeom>
-          <a:solidFill>
-            <a:srgbClr val="8D3443"/>
-          </a:solidFill>
-          <a:ln>
-            <a:noFill/>
-          </a:ln>
-        </p:spPr>
-        <p:txBody>
-          <a:bodyPr rtlCol="0" anchor="ctr"/>
-          <a:lstStyle/>
-          <a:p>
-            <a:pPr algn="ctr"/>
-          </a:p>
-        </p:txBody>
-      </p:sp>
-      <p:sp>
-        <p:nvSpPr>
-          <p:cNvPr id="13" name="장식"/>
-          <p:cNvSpPr/>
-          <p:nvPr/>
-        </p:nvSpPr>
-        <p:spPr>
-          <a:xfrm>
-            <a:off x="6296101" y="1028700"/>
-            <a:ext cx="150876" cy="50292"/>
-          </a:xfrm>
-          <a:prstGeom prst="rect">
-            <a:avLst/>
-          </a:prstGeom>
-          <a:solidFill>
-            <a:srgbClr val="8D3443"/>
-          </a:solidFill>
-          <a:ln>
-            <a:noFill/>
-          </a:ln>
-        </p:spPr>
-        <p:txBody>
-          <a:bodyPr rtlCol="0" anchor="ctr"/>
-          <a:lstStyle/>
-          <a:p>
-            <a:pPr algn="ctr"/>
-          </a:p>
-        </p:txBody>
-      </p:sp>
-      <p:sp>
-        <p:nvSpPr>
           <p:cNvPr id="2" name="Title 1"/>
           <p:cNvSpPr>
             <a:spLocks noGrp="1"/>
@@ -5611,7 +4264,7 @@
       </p:sp>
       <p:sp>
         <p:nvSpPr>
-          <p:cNvPr id="14" name="번호"/>
+          <p:cNvPr id="5" name="번호"/>
           <p:cNvSpPr txBox="1"/>
           <p:nvPr/>
         </p:nvSpPr>
@@ -5649,7 +4302,7 @@
       </p:sp>
       <p:sp>
         <p:nvSpPr>
-          <p:cNvPr id="15" name="본문"/>
+          <p:cNvPr id="6" name="본문"/>
           <p:cNvSpPr txBox="1"/>
           <p:nvPr/>
         </p:nvSpPr>
@@ -5687,7 +4340,7 @@
       </p:sp>
       <p:sp>
         <p:nvSpPr>
-          <p:cNvPr id="16" name="쪽 번호"/>
+          <p:cNvPr id="7" name="쪽 번호"/>
           <p:cNvSpPr txBox="1"/>
           <p:nvPr/>
         </p:nvSpPr>
@@ -5809,267 +4462,6 @@
       </p:sp>
       <p:sp>
         <p:nvSpPr>
-          <p:cNvPr id="5" name="장식"/>
-          <p:cNvSpPr/>
-          <p:nvPr/>
-        </p:nvSpPr>
-        <p:spPr>
-          <a:xfrm>
-            <a:off x="5456224" y="525780"/>
-            <a:ext cx="301752" cy="502920"/>
-          </a:xfrm>
-          <a:prstGeom prst="roundRect">
-            <a:avLst/>
-          </a:prstGeom>
-          <a:solidFill>
-            <a:srgbClr val="8D3443"/>
-          </a:solidFill>
-          <a:ln>
-            <a:noFill/>
-          </a:ln>
-        </p:spPr>
-        <p:txBody>
-          <a:bodyPr rtlCol="0" anchor="ctr"/>
-          <a:lstStyle/>
-          <a:p>
-            <a:pPr algn="ctr"/>
-          </a:p>
-        </p:txBody>
-      </p:sp>
-      <p:sp>
-        <p:nvSpPr>
-          <p:cNvPr id="6" name="장식"/>
-          <p:cNvSpPr/>
-          <p:nvPr/>
-        </p:nvSpPr>
-        <p:spPr>
-          <a:xfrm>
-            <a:off x="5531662" y="475487"/>
-            <a:ext cx="150876" cy="50292"/>
-          </a:xfrm>
-          <a:prstGeom prst="rect">
-            <a:avLst/>
-          </a:prstGeom>
-          <a:solidFill>
-            <a:srgbClr val="3B9158"/>
-          </a:solidFill>
-          <a:ln>
-            <a:noFill/>
-          </a:ln>
-        </p:spPr>
-        <p:txBody>
-          <a:bodyPr rtlCol="0" anchor="ctr"/>
-          <a:lstStyle/>
-          <a:p>
-            <a:pPr algn="ctr"/>
-          </a:p>
-        </p:txBody>
-      </p:sp>
-      <p:sp>
-        <p:nvSpPr>
-          <p:cNvPr id="7" name="장식"/>
-          <p:cNvSpPr/>
-          <p:nvPr/>
-        </p:nvSpPr>
-        <p:spPr>
-          <a:xfrm>
-            <a:off x="5531662" y="1028700"/>
-            <a:ext cx="150876" cy="50292"/>
-          </a:xfrm>
-          <a:prstGeom prst="rect">
-            <a:avLst/>
-          </a:prstGeom>
-          <a:solidFill>
-            <a:srgbClr val="3B9158"/>
-          </a:solidFill>
-          <a:ln>
-            <a:noFill/>
-          </a:ln>
-        </p:spPr>
-        <p:txBody>
-          <a:bodyPr rtlCol="0" anchor="ctr"/>
-          <a:lstStyle/>
-          <a:p>
-            <a:pPr algn="ctr"/>
-          </a:p>
-        </p:txBody>
-      </p:sp>
-      <p:sp>
-        <p:nvSpPr>
-          <p:cNvPr id="8" name="장식"/>
-          <p:cNvSpPr/>
-          <p:nvPr/>
-        </p:nvSpPr>
-        <p:spPr>
-          <a:xfrm>
-            <a:off x="5838444" y="706831"/>
-            <a:ext cx="301752" cy="422452"/>
-          </a:xfrm>
-          <a:prstGeom prst="roundRect">
-            <a:avLst/>
-          </a:prstGeom>
-          <a:solidFill>
-            <a:srgbClr val="F0D1D6"/>
-          </a:solidFill>
-          <a:ln>
-            <a:noFill/>
-          </a:ln>
-        </p:spPr>
-        <p:txBody>
-          <a:bodyPr rtlCol="0" anchor="ctr"/>
-          <a:lstStyle/>
-          <a:p>
-            <a:pPr algn="ctr"/>
-          </a:p>
-        </p:txBody>
-      </p:sp>
-      <p:sp>
-        <p:nvSpPr>
-          <p:cNvPr id="9" name="장식"/>
-          <p:cNvSpPr/>
-          <p:nvPr/>
-        </p:nvSpPr>
-        <p:spPr>
-          <a:xfrm>
-            <a:off x="5913881" y="656539"/>
-            <a:ext cx="150876" cy="50292"/>
-          </a:xfrm>
-          <a:prstGeom prst="rect">
-            <a:avLst/>
-          </a:prstGeom>
-          <a:solidFill>
-            <a:srgbClr val="3B9158"/>
-          </a:solidFill>
-          <a:ln>
-            <a:noFill/>
-          </a:ln>
-        </p:spPr>
-        <p:txBody>
-          <a:bodyPr rtlCol="0" anchor="ctr"/>
-          <a:lstStyle/>
-          <a:p>
-            <a:pPr algn="ctr"/>
-          </a:p>
-        </p:txBody>
-      </p:sp>
-      <p:sp>
-        <p:nvSpPr>
-          <p:cNvPr id="10" name="장식"/>
-          <p:cNvSpPr/>
-          <p:nvPr/>
-        </p:nvSpPr>
-        <p:spPr>
-          <a:xfrm>
-            <a:off x="5913881" y="1129284"/>
-            <a:ext cx="150876" cy="50292"/>
-          </a:xfrm>
-          <a:prstGeom prst="rect">
-            <a:avLst/>
-          </a:prstGeom>
-          <a:solidFill>
-            <a:srgbClr val="3B9158"/>
-          </a:solidFill>
-          <a:ln>
-            <a:noFill/>
-          </a:ln>
-        </p:spPr>
-        <p:txBody>
-          <a:bodyPr rtlCol="0" anchor="ctr"/>
-          <a:lstStyle/>
-          <a:p>
-            <a:pPr algn="ctr"/>
-          </a:p>
-        </p:txBody>
-      </p:sp>
-      <p:sp>
-        <p:nvSpPr>
-          <p:cNvPr id="11" name="장식"/>
-          <p:cNvSpPr/>
-          <p:nvPr/>
-        </p:nvSpPr>
-        <p:spPr>
-          <a:xfrm>
-            <a:off x="6220663" y="525780"/>
-            <a:ext cx="301752" cy="502920"/>
-          </a:xfrm>
-          <a:prstGeom prst="roundRect">
-            <a:avLst/>
-          </a:prstGeom>
-          <a:solidFill>
-            <a:srgbClr val="3B9158"/>
-          </a:solidFill>
-          <a:ln>
-            <a:noFill/>
-          </a:ln>
-        </p:spPr>
-        <p:txBody>
-          <a:bodyPr rtlCol="0" anchor="ctr"/>
-          <a:lstStyle/>
-          <a:p>
-            <a:pPr algn="ctr"/>
-          </a:p>
-        </p:txBody>
-      </p:sp>
-      <p:sp>
-        <p:nvSpPr>
-          <p:cNvPr id="12" name="장식"/>
-          <p:cNvSpPr/>
-          <p:nvPr/>
-        </p:nvSpPr>
-        <p:spPr>
-          <a:xfrm>
-            <a:off x="6296101" y="475487"/>
-            <a:ext cx="150876" cy="50292"/>
-          </a:xfrm>
-          <a:prstGeom prst="rect">
-            <a:avLst/>
-          </a:prstGeom>
-          <a:solidFill>
-            <a:srgbClr val="8D3443"/>
-          </a:solidFill>
-          <a:ln>
-            <a:noFill/>
-          </a:ln>
-        </p:spPr>
-        <p:txBody>
-          <a:bodyPr rtlCol="0" anchor="ctr"/>
-          <a:lstStyle/>
-          <a:p>
-            <a:pPr algn="ctr"/>
-          </a:p>
-        </p:txBody>
-      </p:sp>
-      <p:sp>
-        <p:nvSpPr>
-          <p:cNvPr id="13" name="장식"/>
-          <p:cNvSpPr/>
-          <p:nvPr/>
-        </p:nvSpPr>
-        <p:spPr>
-          <a:xfrm>
-            <a:off x="6296101" y="1028700"/>
-            <a:ext cx="150876" cy="50292"/>
-          </a:xfrm>
-          <a:prstGeom prst="rect">
-            <a:avLst/>
-          </a:prstGeom>
-          <a:solidFill>
-            <a:srgbClr val="8D3443"/>
-          </a:solidFill>
-          <a:ln>
-            <a:noFill/>
-          </a:ln>
-        </p:spPr>
-        <p:txBody>
-          <a:bodyPr rtlCol="0" anchor="ctr"/>
-          <a:lstStyle/>
-          <a:p>
-            <a:pPr algn="ctr"/>
-          </a:p>
-        </p:txBody>
-      </p:sp>
-      <p:sp>
-        <p:nvSpPr>
           <p:cNvPr id="2" name="Title 1"/>
           <p:cNvSpPr>
             <a:spLocks noGrp="1"/>
@@ -6108,7 +4500,7 @@
       </p:sp>
       <p:sp>
         <p:nvSpPr>
-          <p:cNvPr id="14" name="번호"/>
+          <p:cNvPr id="5" name="번호"/>
           <p:cNvSpPr txBox="1"/>
           <p:nvPr/>
         </p:nvSpPr>
@@ -6146,7 +4538,7 @@
       </p:sp>
       <p:sp>
         <p:nvSpPr>
-          <p:cNvPr id="15" name="본문"/>
+          <p:cNvPr id="6" name="본문"/>
           <p:cNvSpPr txBox="1"/>
           <p:nvPr/>
         </p:nvSpPr>
@@ -6184,7 +4576,7 @@
       </p:sp>
       <p:sp>
         <p:nvSpPr>
-          <p:cNvPr id="16" name="쪽 번호"/>
+          <p:cNvPr id="7" name="쪽 번호"/>
           <p:cNvSpPr txBox="1"/>
           <p:nvPr/>
         </p:nvSpPr>
@@ -6231,14 +4623,6 @@
 <file path=ppt/slides/slide7.xml><?xml version="1.0" encoding="utf-8"?>
 <p:sld xmlns:a="http://schemas.openxmlformats.org/drawingml/2006/main" xmlns:p="http://schemas.openxmlformats.org/presentationml/2006/main" xmlns:r="http://schemas.openxmlformats.org/officeDocument/2006/relationships">
   <p:cSld>
-    <p:bg>
-      <p:bgPr>
-        <a:solidFill>
-          <a:srgbClr val="FFFFFF"/>
-        </a:solidFill>
-        <a:effectLst/>
-      </p:bgPr>
-    </p:bg>
     <p:spTree>
       <p:nvGrpSpPr>
         <p:cNvPr id="1" name=""/>
@@ -6246,325 +4630,30 @@
         <p:nvPr/>
       </p:nvGrpSpPr>
       <p:grpSpPr/>
-      <p:sp>
-        <p:nvSpPr>
-          <p:cNvPr id="3" name="장식"/>
-          <p:cNvSpPr/>
+      <p:pic>
+        <p:nvPicPr>
+          <p:cNvPr id="3" name="표지 그림" descr="news-43.jpg"/>
+          <p:cNvPicPr>
+            <a:picLocks noChangeAspect="1"/>
+          </p:cNvPicPr>
           <p:nvPr/>
-        </p:nvSpPr>
-        <p:spPr>
-          <a:xfrm>
-            <a:off x="-274320" y="4251960"/>
-            <a:ext cx="7406640" cy="2743200"/>
-          </a:xfrm>
-          <a:prstGeom prst="wave">
-            <a:avLst/>
-          </a:prstGeom>
-          <a:solidFill>
-            <a:srgbClr val="F0D1D6"/>
-          </a:solidFill>
-          <a:ln>
-            <a:noFill/>
-          </a:ln>
-        </p:spPr>
-        <p:txBody>
-          <a:bodyPr rtlCol="0" anchor="ctr"/>
-          <a:lstStyle/>
-          <a:p>
-            <a:pPr algn="ctr"/>
-          </a:p>
-        </p:txBody>
-      </p:sp>
-      <p:sp>
-        <p:nvSpPr>
-          <p:cNvPr id="4" name="장식"/>
-          <p:cNvSpPr/>
-          <p:nvPr/>
-        </p:nvSpPr>
-        <p:spPr>
-          <a:xfrm>
-            <a:off x="-274320" y="5074920"/>
-            <a:ext cx="7406640" cy="2331720"/>
-          </a:xfrm>
-          <a:prstGeom prst="wave">
-            <a:avLst/>
-          </a:prstGeom>
-          <a:solidFill>
-            <a:srgbClr val="8D3443"/>
-          </a:solidFill>
-          <a:ln>
-            <a:noFill/>
-          </a:ln>
-        </p:spPr>
-        <p:txBody>
-          <a:bodyPr rtlCol="0" anchor="ctr"/>
-          <a:lstStyle/>
-          <a:p>
-            <a:pPr algn="ctr"/>
-          </a:p>
-        </p:txBody>
-      </p:sp>
-      <p:sp>
-        <p:nvSpPr>
-          <p:cNvPr id="5" name="장식"/>
-          <p:cNvSpPr/>
-          <p:nvPr/>
-        </p:nvSpPr>
-        <p:spPr>
-          <a:xfrm>
-            <a:off x="4169663" y="1234440"/>
-            <a:ext cx="822959" cy="1371600"/>
-          </a:xfrm>
-          <a:prstGeom prst="roundRect">
-            <a:avLst/>
-          </a:prstGeom>
-          <a:solidFill>
-            <a:srgbClr val="8D3443"/>
-          </a:solidFill>
-          <a:ln>
-            <a:noFill/>
-          </a:ln>
-        </p:spPr>
-        <p:txBody>
-          <a:bodyPr rtlCol="0" anchor="ctr"/>
-          <a:lstStyle/>
-          <a:p>
-            <a:pPr algn="ctr"/>
-          </a:p>
-        </p:txBody>
-      </p:sp>
-      <p:sp>
-        <p:nvSpPr>
-          <p:cNvPr id="6" name="장식"/>
-          <p:cNvSpPr/>
-          <p:nvPr/>
-        </p:nvSpPr>
-        <p:spPr>
-          <a:xfrm>
-            <a:off x="4375403" y="1097280"/>
-            <a:ext cx="411479" cy="137160"/>
+        </p:nvPicPr>
+        <p:blipFill>
+          <a:blip r:embed="rId2"/>
+          <a:stretch>
+            <a:fillRect/>
+          </a:stretch>
+        </p:blipFill>
+        <p:spPr>
+          <a:xfrm>
+            <a:off x="0" y="0"/>
+            <a:ext cx="6858000" cy="6858000"/>
           </a:xfrm>
           <a:prstGeom prst="rect">
             <a:avLst/>
           </a:prstGeom>
-          <a:solidFill>
-            <a:srgbClr val="3B9158"/>
-          </a:solidFill>
-          <a:ln>
-            <a:noFill/>
-          </a:ln>
-        </p:spPr>
-        <p:txBody>
-          <a:bodyPr rtlCol="0" anchor="ctr"/>
-          <a:lstStyle/>
-          <a:p>
-            <a:pPr algn="ctr"/>
-          </a:p>
-        </p:txBody>
-      </p:sp>
-      <p:sp>
-        <p:nvSpPr>
-          <p:cNvPr id="7" name="장식"/>
-          <p:cNvSpPr/>
-          <p:nvPr/>
-        </p:nvSpPr>
-        <p:spPr>
-          <a:xfrm>
-            <a:off x="4375403" y="2606040"/>
-            <a:ext cx="411479" cy="137160"/>
-          </a:xfrm>
-          <a:prstGeom prst="rect">
-            <a:avLst/>
-          </a:prstGeom>
-          <a:solidFill>
-            <a:srgbClr val="3B9158"/>
-          </a:solidFill>
-          <a:ln>
-            <a:noFill/>
-          </a:ln>
-        </p:spPr>
-        <p:txBody>
-          <a:bodyPr rtlCol="0" anchor="ctr"/>
-          <a:lstStyle/>
-          <a:p>
-            <a:pPr algn="ctr"/>
-          </a:p>
-        </p:txBody>
-      </p:sp>
-      <p:sp>
-        <p:nvSpPr>
-          <p:cNvPr id="8" name="장식"/>
-          <p:cNvSpPr/>
-          <p:nvPr/>
-        </p:nvSpPr>
-        <p:spPr>
-          <a:xfrm>
-            <a:off x="5212079" y="1728216"/>
-            <a:ext cx="822959" cy="1152144"/>
-          </a:xfrm>
-          <a:prstGeom prst="roundRect">
-            <a:avLst/>
-          </a:prstGeom>
-          <a:solidFill>
-            <a:srgbClr val="F0D1D6"/>
-          </a:solidFill>
-          <a:ln>
-            <a:noFill/>
-          </a:ln>
-        </p:spPr>
-        <p:txBody>
-          <a:bodyPr rtlCol="0" anchor="ctr"/>
-          <a:lstStyle/>
-          <a:p>
-            <a:pPr algn="ctr"/>
-          </a:p>
-        </p:txBody>
-      </p:sp>
-      <p:sp>
-        <p:nvSpPr>
-          <p:cNvPr id="9" name="장식"/>
-          <p:cNvSpPr/>
-          <p:nvPr/>
-        </p:nvSpPr>
-        <p:spPr>
-          <a:xfrm>
-            <a:off x="5417819" y="1591056"/>
-            <a:ext cx="411479" cy="137160"/>
-          </a:xfrm>
-          <a:prstGeom prst="rect">
-            <a:avLst/>
-          </a:prstGeom>
-          <a:solidFill>
-            <a:srgbClr val="3B9158"/>
-          </a:solidFill>
-          <a:ln>
-            <a:noFill/>
-          </a:ln>
-        </p:spPr>
-        <p:txBody>
-          <a:bodyPr rtlCol="0" anchor="ctr"/>
-          <a:lstStyle/>
-          <a:p>
-            <a:pPr algn="ctr"/>
-          </a:p>
-        </p:txBody>
-      </p:sp>
-      <p:sp>
-        <p:nvSpPr>
-          <p:cNvPr id="10" name="장식"/>
-          <p:cNvSpPr/>
-          <p:nvPr/>
-        </p:nvSpPr>
-        <p:spPr>
-          <a:xfrm>
-            <a:off x="5417819" y="2880360"/>
-            <a:ext cx="411479" cy="137160"/>
-          </a:xfrm>
-          <a:prstGeom prst="rect">
-            <a:avLst/>
-          </a:prstGeom>
-          <a:solidFill>
-            <a:srgbClr val="3B9158"/>
-          </a:solidFill>
-          <a:ln>
-            <a:noFill/>
-          </a:ln>
-        </p:spPr>
-        <p:txBody>
-          <a:bodyPr rtlCol="0" anchor="ctr"/>
-          <a:lstStyle/>
-          <a:p>
-            <a:pPr algn="ctr"/>
-          </a:p>
-        </p:txBody>
-      </p:sp>
-      <p:sp>
-        <p:nvSpPr>
-          <p:cNvPr id="11" name="장식"/>
-          <p:cNvSpPr/>
-          <p:nvPr/>
-        </p:nvSpPr>
-        <p:spPr>
-          <a:xfrm>
-            <a:off x="6254495" y="1234440"/>
-            <a:ext cx="822959" cy="1371600"/>
-          </a:xfrm>
-          <a:prstGeom prst="roundRect">
-            <a:avLst/>
-          </a:prstGeom>
-          <a:solidFill>
-            <a:srgbClr val="3B9158"/>
-          </a:solidFill>
-          <a:ln>
-            <a:noFill/>
-          </a:ln>
-        </p:spPr>
-        <p:txBody>
-          <a:bodyPr rtlCol="0" anchor="ctr"/>
-          <a:lstStyle/>
-          <a:p>
-            <a:pPr algn="ctr"/>
-          </a:p>
-        </p:txBody>
-      </p:sp>
-      <p:sp>
-        <p:nvSpPr>
-          <p:cNvPr id="12" name="장식"/>
-          <p:cNvSpPr/>
-          <p:nvPr/>
-        </p:nvSpPr>
-        <p:spPr>
-          <a:xfrm>
-            <a:off x="6460235" y="1097280"/>
-            <a:ext cx="411479" cy="137160"/>
-          </a:xfrm>
-          <a:prstGeom prst="rect">
-            <a:avLst/>
-          </a:prstGeom>
-          <a:solidFill>
-            <a:srgbClr val="8D3443"/>
-          </a:solidFill>
-          <a:ln>
-            <a:noFill/>
-          </a:ln>
-        </p:spPr>
-        <p:txBody>
-          <a:bodyPr rtlCol="0" anchor="ctr"/>
-          <a:lstStyle/>
-          <a:p>
-            <a:pPr algn="ctr"/>
-          </a:p>
-        </p:txBody>
-      </p:sp>
-      <p:sp>
-        <p:nvSpPr>
-          <p:cNvPr id="13" name="장식"/>
-          <p:cNvSpPr/>
-          <p:nvPr/>
-        </p:nvSpPr>
-        <p:spPr>
-          <a:xfrm>
-            <a:off x="6460235" y="2606040"/>
-            <a:ext cx="411479" cy="137160"/>
-          </a:xfrm>
-          <a:prstGeom prst="rect">
-            <a:avLst/>
-          </a:prstGeom>
-          <a:solidFill>
-            <a:srgbClr val="8D3443"/>
-          </a:solidFill>
-          <a:ln>
-            <a:noFill/>
-          </a:ln>
-        </p:spPr>
-        <p:txBody>
-          <a:bodyPr rtlCol="0" anchor="ctr"/>
-          <a:lstStyle/>
-          <a:p>
-            <a:pPr algn="ctr"/>
-          </a:p>
-        </p:txBody>
-      </p:sp>
+        </p:spPr>
+      </p:pic>
       <p:sp>
         <p:nvSpPr>
           <p:cNvPr id="2" name="Title 1"/>
@@ -6577,8 +4666,8 @@
         </p:nvSpPr>
         <p:spPr>
           <a:xfrm>
-            <a:off x="548640" y="1371600"/>
-            <a:ext cx="4251960" cy="1463040"/>
+            <a:off x="685800" y="960120"/>
+            <a:ext cx="5486400" cy="1463040"/>
           </a:xfrm>
         </p:spPr>
         <p:txBody>
@@ -6605,14 +4694,14 @@
       </p:sp>
       <p:sp>
         <p:nvSpPr>
-          <p:cNvPr id="14" name="한 줄 문구"/>
+          <p:cNvPr id="4" name="한 줄 문구"/>
           <p:cNvSpPr txBox="1"/>
           <p:nvPr/>
         </p:nvSpPr>
         <p:spPr>
           <a:xfrm>
-            <a:off x="548640" y="2926080"/>
-            <a:ext cx="4114800" cy="822960"/>
+            <a:off x="685800" y="2560320"/>
+            <a:ext cx="5486400" cy="822960"/>
           </a:xfrm>
           <a:prstGeom prst="rect">
             <a:avLst/>
@@ -6643,14 +4732,14 @@
       </p:sp>
       <p:sp>
         <p:nvSpPr>
-          <p:cNvPr id="15" name="안내 문구"/>
+          <p:cNvPr id="5" name="안내 문구"/>
           <p:cNvSpPr txBox="1"/>
           <p:nvPr/>
         </p:nvSpPr>
         <p:spPr>
           <a:xfrm>
-            <a:off x="548640" y="3794760"/>
-            <a:ext cx="4114800" cy="914400"/>
+            <a:off x="685800" y="3429000"/>
+            <a:ext cx="5486400" cy="914400"/>
           </a:xfrm>
           <a:prstGeom prst="rect">
             <a:avLst/>
